--- a/Presentations/Pptx/Audit_Presentation.pptx
+++ b/Presentations/Pptx/Audit_Presentation.pptx
@@ -6615,7 +6615,7 @@
               <a:buNone/>
             </a:pPr>
             <a:r>
-              <a:rPr lang="en-US" sz="1600" b="1" dirty="0">
+              <a:rPr lang="en-US" sz="1600" dirty="0">
                 <a:solidFill>
                   <a:srgbClr val="BDD0EE"/>
                 </a:solidFill>
@@ -6623,7 +6623,7 @@
                 <a:ea typeface="Arial" pitchFamily="34" charset="-122"/>
                 <a:cs typeface="Arial" pitchFamily="34" charset="-120"/>
               </a:rPr>
-              <a:t>Career Catalyst: Audit work</a:t>
+              <a:t>Audit Work Presentation</a:t>
             </a:r>
           </a:p>
           <a:p>
@@ -6649,13 +6649,13 @@
   <p:clrMapOvr>
     <a:masterClrMapping/>
   </p:clrMapOvr>
-  <mc:AlternateContent xmlns:mc="http://schemas.openxmlformats.org/markup-compatibility/2006">
-    <mc:Choice xmlns:p159="http://schemas.microsoft.com/office/powerpoint/2015/09/main" Requires="p159">
+  <mc:AlternateContent xmlns:mc="http://schemas.openxmlformats.org/markup-compatibility/2006" xmlns:p159="http://schemas.microsoft.com/office/powerpoint/2015/09/main">
+    <mc:Choice Requires="p159">
       <p:transition xmlns:p14="http://schemas.microsoft.com/office/powerpoint/2010/main" spd="slow" p14:dur="2000">
         <p159:morph option="byObject"/>
       </p:transition>
     </mc:Choice>
-    <mc:Fallback>
+    <mc:Fallback xmlns="">
       <p:transition spd="slow">
         <p:fade/>
       </p:transition>
@@ -8056,13 +8056,13 @@
   <p:clrMapOvr>
     <a:masterClrMapping/>
   </p:clrMapOvr>
-  <mc:AlternateContent xmlns:mc="http://schemas.openxmlformats.org/markup-compatibility/2006">
-    <mc:Choice xmlns:p159="http://schemas.microsoft.com/office/powerpoint/2015/09/main" Requires="p159">
+  <mc:AlternateContent xmlns:mc="http://schemas.openxmlformats.org/markup-compatibility/2006" xmlns:p159="http://schemas.microsoft.com/office/powerpoint/2015/09/main">
+    <mc:Choice Requires="p159">
       <p:transition xmlns:p14="http://schemas.microsoft.com/office/powerpoint/2010/main" spd="slow" p14:dur="2000">
         <p159:morph option="byObject"/>
       </p:transition>
     </mc:Choice>
-    <mc:Fallback>
+    <mc:Fallback xmlns="">
       <p:transition spd="slow">
         <p:fade/>
       </p:transition>
@@ -8410,13 +8410,13 @@
   <p:clrMapOvr>
     <a:masterClrMapping/>
   </p:clrMapOvr>
-  <mc:AlternateContent xmlns:mc="http://schemas.openxmlformats.org/markup-compatibility/2006">
-    <mc:Choice xmlns:p159="http://schemas.microsoft.com/office/powerpoint/2015/09/main" Requires="p159">
+  <mc:AlternateContent xmlns:mc="http://schemas.openxmlformats.org/markup-compatibility/2006" xmlns:p159="http://schemas.microsoft.com/office/powerpoint/2015/09/main">
+    <mc:Choice Requires="p159">
       <p:transition xmlns:p14="http://schemas.microsoft.com/office/powerpoint/2010/main" spd="slow" p14:dur="2000">
         <p159:morph option="byObject"/>
       </p:transition>
     </mc:Choice>
-    <mc:Fallback>
+    <mc:Fallback xmlns="">
       <p:transition spd="slow">
         <p:fade/>
       </p:transition>
@@ -9428,13 +9428,13 @@
   <p:clrMapOvr>
     <a:masterClrMapping/>
   </p:clrMapOvr>
-  <mc:AlternateContent xmlns:mc="http://schemas.openxmlformats.org/markup-compatibility/2006">
-    <mc:Choice xmlns:p159="http://schemas.microsoft.com/office/powerpoint/2015/09/main" Requires="p159">
+  <mc:AlternateContent xmlns:mc="http://schemas.openxmlformats.org/markup-compatibility/2006" xmlns:p159="http://schemas.microsoft.com/office/powerpoint/2015/09/main">
+    <mc:Choice Requires="p159">
       <p:transition xmlns:p14="http://schemas.microsoft.com/office/powerpoint/2010/main" spd="slow" p14:dur="2000">
         <p159:morph option="byObject"/>
       </p:transition>
     </mc:Choice>
-    <mc:Fallback>
+    <mc:Fallback xmlns="">
       <p:transition spd="slow">
         <p:fade/>
       </p:transition>
@@ -9592,13 +9592,13 @@
   <p:clrMapOvr>
     <a:masterClrMapping/>
   </p:clrMapOvr>
-  <mc:AlternateContent xmlns:mc="http://schemas.openxmlformats.org/markup-compatibility/2006">
-    <mc:Choice xmlns:p159="http://schemas.microsoft.com/office/powerpoint/2015/09/main" Requires="p159">
+  <mc:AlternateContent xmlns:mc="http://schemas.openxmlformats.org/markup-compatibility/2006" xmlns:p159="http://schemas.microsoft.com/office/powerpoint/2015/09/main">
+    <mc:Choice Requires="p159">
       <p:transition xmlns:p14="http://schemas.microsoft.com/office/powerpoint/2010/main" spd="slow" p14:dur="2000">
         <p159:morph option="byObject"/>
       </p:transition>
     </mc:Choice>
-    <mc:Fallback>
+    <mc:Fallback xmlns="">
       <p:transition spd="slow">
         <p:fade/>
       </p:transition>
@@ -9849,13 +9849,13 @@
   <p:clrMapOvr>
     <a:masterClrMapping/>
   </p:clrMapOvr>
-  <mc:AlternateContent xmlns:mc="http://schemas.openxmlformats.org/markup-compatibility/2006">
-    <mc:Choice xmlns:p159="http://schemas.microsoft.com/office/powerpoint/2015/09/main" Requires="p159">
+  <mc:AlternateContent xmlns:mc="http://schemas.openxmlformats.org/markup-compatibility/2006" xmlns:p159="http://schemas.microsoft.com/office/powerpoint/2015/09/main">
+    <mc:Choice Requires="p159">
       <p:transition xmlns:p14="http://schemas.microsoft.com/office/powerpoint/2010/main" spd="slow" p14:dur="2000">
         <p159:morph option="byObject"/>
       </p:transition>
     </mc:Choice>
-    <mc:Fallback>
+    <mc:Fallback xmlns="">
       <p:transition spd="slow">
         <p:fade/>
       </p:transition>
@@ -10054,13 +10054,13 @@
   <p:clrMapOvr>
     <a:masterClrMapping/>
   </p:clrMapOvr>
-  <mc:AlternateContent xmlns:mc="http://schemas.openxmlformats.org/markup-compatibility/2006">
-    <mc:Choice xmlns:p159="http://schemas.microsoft.com/office/powerpoint/2015/09/main" Requires="p159">
+  <mc:AlternateContent xmlns:mc="http://schemas.openxmlformats.org/markup-compatibility/2006" xmlns:p159="http://schemas.microsoft.com/office/powerpoint/2015/09/main">
+    <mc:Choice Requires="p159">
       <p:transition xmlns:p14="http://schemas.microsoft.com/office/powerpoint/2010/main" spd="slow" p14:dur="2000">
         <p159:morph option="byObject"/>
       </p:transition>
     </mc:Choice>
-    <mc:Fallback>
+    <mc:Fallback xmlns="">
       <p:transition spd="slow">
         <p:fade/>
       </p:transition>
